--- a/Sentiment Analysis Final PPT.pptx
+++ b/Sentiment Analysis Final PPT.pptx
@@ -15,9 +15,10 @@
     <p:sldId id="267" r:id="rId9"/>
     <p:sldId id="268" r:id="rId10"/>
     <p:sldId id="269" r:id="rId11"/>
-    <p:sldId id="271" r:id="rId12"/>
-    <p:sldId id="275" r:id="rId13"/>
-    <p:sldId id="274" r:id="rId14"/>
+    <p:sldId id="275" r:id="rId12"/>
+    <p:sldId id="276" r:id="rId13"/>
+    <p:sldId id="271" r:id="rId14"/>
+    <p:sldId id="274" r:id="rId15"/>
   </p:sldIdLst>
   <p:sldSz cx="12192000" cy="6858000"/>
   <p:notesSz cx="6858000" cy="9144000"/>
@@ -307,7 +308,7 @@
           <a:p>
             <a:fld id="{B9E2951A-94FE-4D44-9741-E4F303398E8B}" type="datetimeFigureOut">
               <a:rPr lang="en-IN" smtClean="0"/>
-              <a:t>05-04-2025</a:t>
+              <a:t>06-04-2025</a:t>
             </a:fld>
             <a:endParaRPr lang="en-IN"/>
           </a:p>
@@ -582,7 +583,7 @@
           <a:p>
             <a:fld id="{B9E2951A-94FE-4D44-9741-E4F303398E8B}" type="datetimeFigureOut">
               <a:rPr lang="en-IN" smtClean="0"/>
-              <a:t>05-04-2025</a:t>
+              <a:t>06-04-2025</a:t>
             </a:fld>
             <a:endParaRPr lang="en-IN"/>
           </a:p>
@@ -776,7 +777,7 @@
           <a:p>
             <a:fld id="{B9E2951A-94FE-4D44-9741-E4F303398E8B}" type="datetimeFigureOut">
               <a:rPr lang="en-IN" smtClean="0"/>
-              <a:t>05-04-2025</a:t>
+              <a:t>06-04-2025</a:t>
             </a:fld>
             <a:endParaRPr lang="en-IN"/>
           </a:p>
@@ -1044,7 +1045,7 @@
           <a:p>
             <a:fld id="{B9E2951A-94FE-4D44-9741-E4F303398E8B}" type="datetimeFigureOut">
               <a:rPr lang="en-IN" smtClean="0"/>
-              <a:t>05-04-2025</a:t>
+              <a:t>06-04-2025</a:t>
             </a:fld>
             <a:endParaRPr lang="en-IN"/>
           </a:p>
@@ -1376,7 +1377,7 @@
           <a:p>
             <a:fld id="{B9E2951A-94FE-4D44-9741-E4F303398E8B}" type="datetimeFigureOut">
               <a:rPr lang="en-IN" smtClean="0"/>
-              <a:t>05-04-2025</a:t>
+              <a:t>06-04-2025</a:t>
             </a:fld>
             <a:endParaRPr lang="en-IN"/>
           </a:p>
@@ -1986,7 +1987,7 @@
           <a:p>
             <a:fld id="{B9E2951A-94FE-4D44-9741-E4F303398E8B}" type="datetimeFigureOut">
               <a:rPr lang="en-IN" smtClean="0"/>
-              <a:t>05-04-2025</a:t>
+              <a:t>06-04-2025</a:t>
             </a:fld>
             <a:endParaRPr lang="en-IN"/>
           </a:p>
@@ -2833,7 +2834,7 @@
           <a:p>
             <a:fld id="{B9E2951A-94FE-4D44-9741-E4F303398E8B}" type="datetimeFigureOut">
               <a:rPr lang="en-IN" smtClean="0"/>
-              <a:t>05-04-2025</a:t>
+              <a:t>06-04-2025</a:t>
             </a:fld>
             <a:endParaRPr lang="en-IN"/>
           </a:p>
@@ -3003,7 +3004,7 @@
           <a:p>
             <a:fld id="{B9E2951A-94FE-4D44-9741-E4F303398E8B}" type="datetimeFigureOut">
               <a:rPr lang="en-IN" smtClean="0"/>
-              <a:t>05-04-2025</a:t>
+              <a:t>06-04-2025</a:t>
             </a:fld>
             <a:endParaRPr lang="en-IN"/>
           </a:p>
@@ -3183,7 +3184,7 @@
           <a:p>
             <a:fld id="{B9E2951A-94FE-4D44-9741-E4F303398E8B}" type="datetimeFigureOut">
               <a:rPr lang="en-IN" smtClean="0"/>
-              <a:t>05-04-2025</a:t>
+              <a:t>06-04-2025</a:t>
             </a:fld>
             <a:endParaRPr lang="en-IN"/>
           </a:p>
@@ -3353,7 +3354,7 @@
           <a:p>
             <a:fld id="{B9E2951A-94FE-4D44-9741-E4F303398E8B}" type="datetimeFigureOut">
               <a:rPr lang="en-IN" smtClean="0"/>
-              <a:t>05-04-2025</a:t>
+              <a:t>06-04-2025</a:t>
             </a:fld>
             <a:endParaRPr lang="en-IN"/>
           </a:p>
@@ -3597,7 +3598,7 @@
           <a:p>
             <a:fld id="{B9E2951A-94FE-4D44-9741-E4F303398E8B}" type="datetimeFigureOut">
               <a:rPr lang="en-IN" smtClean="0"/>
-              <a:t>05-04-2025</a:t>
+              <a:t>06-04-2025</a:t>
             </a:fld>
             <a:endParaRPr lang="en-IN"/>
           </a:p>
@@ -3889,7 +3890,7 @@
           <a:p>
             <a:fld id="{B9E2951A-94FE-4D44-9741-E4F303398E8B}" type="datetimeFigureOut">
               <a:rPr lang="en-IN" smtClean="0"/>
-              <a:t>05-04-2025</a:t>
+              <a:t>06-04-2025</a:t>
             </a:fld>
             <a:endParaRPr lang="en-IN"/>
           </a:p>
@@ -4327,7 +4328,7 @@
           <a:p>
             <a:fld id="{B9E2951A-94FE-4D44-9741-E4F303398E8B}" type="datetimeFigureOut">
               <a:rPr lang="en-IN" smtClean="0"/>
-              <a:t>05-04-2025</a:t>
+              <a:t>06-04-2025</a:t>
             </a:fld>
             <a:endParaRPr lang="en-IN"/>
           </a:p>
@@ -4445,7 +4446,7 @@
           <a:p>
             <a:fld id="{B9E2951A-94FE-4D44-9741-E4F303398E8B}" type="datetimeFigureOut">
               <a:rPr lang="en-IN" smtClean="0"/>
-              <a:t>05-04-2025</a:t>
+              <a:t>06-04-2025</a:t>
             </a:fld>
             <a:endParaRPr lang="en-IN"/>
           </a:p>
@@ -4540,7 +4541,7 @@
           <a:p>
             <a:fld id="{B9E2951A-94FE-4D44-9741-E4F303398E8B}" type="datetimeFigureOut">
               <a:rPr lang="en-IN" smtClean="0"/>
-              <a:t>05-04-2025</a:t>
+              <a:t>06-04-2025</a:t>
             </a:fld>
             <a:endParaRPr lang="en-IN"/>
           </a:p>
@@ -4819,7 +4820,7 @@
           <a:p>
             <a:fld id="{B9E2951A-94FE-4D44-9741-E4F303398E8B}" type="datetimeFigureOut">
               <a:rPr lang="en-IN" smtClean="0"/>
-              <a:t>05-04-2025</a:t>
+              <a:t>06-04-2025</a:t>
             </a:fld>
             <a:endParaRPr lang="en-IN"/>
           </a:p>
@@ -5094,7 +5095,7 @@
           <a:p>
             <a:fld id="{B9E2951A-94FE-4D44-9741-E4F303398E8B}" type="datetimeFigureOut">
               <a:rPr lang="en-IN" smtClean="0"/>
-              <a:t>05-04-2025</a:t>
+              <a:t>06-04-2025</a:t>
             </a:fld>
             <a:endParaRPr lang="en-IN"/>
           </a:p>
@@ -5523,7 +5524,7 @@
           <a:p>
             <a:fld id="{B9E2951A-94FE-4D44-9741-E4F303398E8B}" type="datetimeFigureOut">
               <a:rPr lang="en-IN" smtClean="0"/>
-              <a:t>05-04-2025</a:t>
+              <a:t>06-04-2025</a:t>
             </a:fld>
             <a:endParaRPr lang="en-IN"/>
           </a:p>
@@ -6143,12 +6144,6 @@
           <a:p>
             <a:r>
               <a:rPr lang="en-US" dirty="0"/>
-              <a:t>Aditya G Hiremath</a:t>
-            </a:r>
-          </a:p>
-          <a:p>
-            <a:r>
-              <a:rPr lang="en-US" dirty="0"/>
               <a:t>P Arjun</a:t>
             </a:r>
             <a:endParaRPr lang="en-IN" dirty="0"/>
@@ -6260,12 +6255,189 @@
           </a:p>
         </p:txBody>
       </p:sp>
+      <p:sp>
+        <p:nvSpPr>
+          <p:cNvPr id="12" name="Content Placeholder 2">
+            <a:extLst>
+              <a:ext uri="{FF2B5EF4-FFF2-40B4-BE49-F238E27FC236}">
+                <a16:creationId xmlns:a16="http://schemas.microsoft.com/office/drawing/2014/main" id="{6C1AB3A9-D5F9-DA72-DA2C-C9C4461302F9}"/>
+              </a:ext>
+            </a:extLst>
+          </p:cNvPr>
+          <p:cNvSpPr>
+            <a:spLocks noGrp="1"/>
+          </p:cNvSpPr>
+          <p:nvPr>
+            <p:ph idx="1"/>
+          </p:nvPr>
+        </p:nvSpPr>
+        <p:spPr>
+          <a:xfrm>
+            <a:off x="6634475" y="1483214"/>
+            <a:ext cx="5329728" cy="4195481"/>
+          </a:xfrm>
+        </p:spPr>
+        <p:txBody>
+          <a:bodyPr>
+            <a:normAutofit/>
+          </a:bodyPr>
+          <a:lstStyle/>
+          <a:p>
+            <a:pPr marL="0" indent="0">
+              <a:buNone/>
+            </a:pPr>
+            <a:r>
+              <a:rPr lang="en-IN" b="1" u="sng" dirty="0"/>
+              <a:t>1. Overall Accuracy</a:t>
+            </a:r>
+          </a:p>
+          <a:p>
+            <a:pPr marL="0" indent="0">
+              <a:buNone/>
+            </a:pPr>
+            <a:r>
+              <a:rPr lang="en-IN" sz="1600" dirty="0"/>
+              <a:t>Out of 25,000 prediction 24,515 are correct. This gives an accuracy of 98.52% indicating excellent performance.</a:t>
+            </a:r>
+          </a:p>
+          <a:p>
+            <a:pPr marL="0" indent="0">
+              <a:buNone/>
+            </a:pPr>
+            <a:r>
+              <a:rPr lang="en-IN" b="1" u="sng" dirty="0"/>
+              <a:t>2. Balanced Performance</a:t>
+            </a:r>
+          </a:p>
+          <a:p>
+            <a:pPr marL="0" indent="0">
+              <a:buNone/>
+            </a:pPr>
+            <a:r>
+              <a:rPr lang="en-US" sz="1600" b="1" dirty="0">
+                <a:latin typeface="Century Gothic (Headings)"/>
+              </a:rPr>
+              <a:t>-&gt; True Negatives (TN): 12,315</a:t>
+            </a:r>
+            <a:r>
+              <a:rPr lang="en-US" sz="1600" dirty="0">
+                <a:latin typeface="Century Gothic (Headings)"/>
+              </a:rPr>
+              <a:t> → Model correctly predicted class 0.</a:t>
+            </a:r>
+            <a:endParaRPr lang="en-IN" sz="1600" dirty="0">
+              <a:latin typeface="Century Gothic (Headings)"/>
+            </a:endParaRPr>
+          </a:p>
+          <a:p>
+            <a:pPr marL="0" lvl="0" indent="0" defTabSz="914400" eaLnBrk="0" fontAlgn="base" hangingPunct="0">
+              <a:spcBef>
+                <a:spcPct val="0"/>
+              </a:spcBef>
+              <a:spcAft>
+                <a:spcPct val="0"/>
+              </a:spcAft>
+              <a:buNone/>
+            </a:pPr>
+            <a:r>
+              <a:rPr kumimoji="0" lang="en-US" altLang="en-US" sz="1600" b="1" i="0" u="none" strike="noStrike" cap="none" normalizeH="0" baseline="0" dirty="0">
+                <a:ln>
+                  <a:noFill/>
+                </a:ln>
+                <a:solidFill>
+                  <a:schemeClr val="tx1"/>
+                </a:solidFill>
+                <a:effectLst/>
+                <a:latin typeface="Century Gothic (Headings)"/>
+              </a:rPr>
+              <a:t>-&gt; True Positives(TP):</a:t>
+            </a:r>
+            <a:r>
+              <a:rPr lang="en-US" altLang="en-US" sz="1600" b="1" dirty="0">
+                <a:latin typeface="Century Gothic (Headings)"/>
+              </a:rPr>
+              <a:t> 12,200</a:t>
+            </a:r>
+            <a:r>
+              <a:rPr lang="en-US" altLang="en-US" sz="1600" dirty="0">
+                <a:latin typeface="Century Gothic (Headings)"/>
+              </a:rPr>
+              <a:t> → Model correctly predicted class 1.</a:t>
+            </a:r>
+          </a:p>
+          <a:p>
+            <a:pPr marL="0" lvl="0" indent="0" defTabSz="914400" eaLnBrk="0" fontAlgn="base" hangingPunct="0">
+              <a:spcBef>
+                <a:spcPct val="0"/>
+              </a:spcBef>
+              <a:spcAft>
+                <a:spcPct val="0"/>
+              </a:spcAft>
+              <a:buNone/>
+            </a:pPr>
+            <a:r>
+              <a:rPr lang="en-US" altLang="en-US" sz="1600" b="1" dirty="0">
+                <a:latin typeface="Century Gothic (Headings)"/>
+              </a:rPr>
+              <a:t>-&gt; False Positives (FP): 250</a:t>
+            </a:r>
+            <a:r>
+              <a:rPr lang="en-US" altLang="en-US" sz="1600" dirty="0">
+                <a:latin typeface="Century Gothic (Headings)"/>
+              </a:rPr>
+              <a:t> → Model predicted 1 when the actual label was 0.</a:t>
+            </a:r>
+          </a:p>
+          <a:p>
+            <a:pPr marL="0" lvl="0" indent="0" defTabSz="914400" eaLnBrk="0" fontAlgn="base" hangingPunct="0">
+              <a:spcBef>
+                <a:spcPct val="0"/>
+              </a:spcBef>
+              <a:spcAft>
+                <a:spcPct val="0"/>
+              </a:spcAft>
+              <a:buNone/>
+            </a:pPr>
+            <a:r>
+              <a:rPr lang="en-US" altLang="en-US" sz="1600" b="1" dirty="0">
+                <a:latin typeface="Century Gothic (Headings)"/>
+              </a:rPr>
+              <a:t>-&gt; False Negatives (FN): 235</a:t>
+            </a:r>
+            <a:r>
+              <a:rPr lang="en-US" altLang="en-US" sz="1600" dirty="0">
+                <a:latin typeface="Century Gothic (Headings)"/>
+              </a:rPr>
+              <a:t> → Model </a:t>
+            </a:r>
+            <a:r>
+              <a:rPr kumimoji="0" lang="en-US" altLang="en-US" sz="1600" b="0" i="0" u="none" strike="noStrike" cap="none" normalizeH="0" baseline="0" dirty="0">
+                <a:ln>
+                  <a:noFill/>
+                </a:ln>
+                <a:solidFill>
+                  <a:schemeClr val="tx1"/>
+                </a:solidFill>
+                <a:effectLst/>
+                <a:latin typeface="Century Gothic (Headings)"/>
+              </a:rPr>
+              <a:t>predicted 0 when the actual label was 1.</a:t>
+            </a:r>
+          </a:p>
+          <a:p>
+            <a:pPr marL="0" indent="0">
+              <a:buNone/>
+            </a:pPr>
+            <a:endParaRPr lang="en-IN" sz="1600" dirty="0"/>
+          </a:p>
+        </p:txBody>
+      </p:sp>
       <p:pic>
         <p:nvPicPr>
-          <p:cNvPr id="9" name="Picture 8">
+          <p:cNvPr id="4" name="Picture 3">
             <a:extLst>
               <a:ext uri="{FF2B5EF4-FFF2-40B4-BE49-F238E27FC236}">
-                <a16:creationId xmlns:a16="http://schemas.microsoft.com/office/drawing/2014/main" id="{82B13CE0-554A-CBFA-BED8-9CE666351010}"/>
+                <a16:creationId xmlns:a16="http://schemas.microsoft.com/office/drawing/2014/main" id="{CED395B1-B436-7183-148A-A1B3B7905463}"/>
               </a:ext>
             </a:extLst>
           </p:cNvPr>
@@ -6282,191 +6454,14 @@
         </p:blipFill>
         <p:spPr>
           <a:xfrm>
-            <a:off x="575493" y="1414981"/>
-            <a:ext cx="5777181" cy="4990301"/>
+            <a:off x="521717" y="1483214"/>
+            <a:ext cx="5792456" cy="4503700"/>
           </a:xfrm>
           <a:prstGeom prst="rect">
             <a:avLst/>
           </a:prstGeom>
         </p:spPr>
       </p:pic>
-      <p:sp>
-        <p:nvSpPr>
-          <p:cNvPr id="12" name="Content Placeholder 2">
-            <a:extLst>
-              <a:ext uri="{FF2B5EF4-FFF2-40B4-BE49-F238E27FC236}">
-                <a16:creationId xmlns:a16="http://schemas.microsoft.com/office/drawing/2014/main" id="{6C1AB3A9-D5F9-DA72-DA2C-C9C4461302F9}"/>
-              </a:ext>
-            </a:extLst>
-          </p:cNvPr>
-          <p:cNvSpPr>
-            <a:spLocks noGrp="1"/>
-          </p:cNvSpPr>
-          <p:nvPr>
-            <p:ph idx="1"/>
-          </p:nvPr>
-        </p:nvSpPr>
-        <p:spPr>
-          <a:xfrm>
-            <a:off x="6634475" y="1483214"/>
-            <a:ext cx="5329728" cy="4195481"/>
-          </a:xfrm>
-        </p:spPr>
-        <p:txBody>
-          <a:bodyPr>
-            <a:normAutofit/>
-          </a:bodyPr>
-          <a:lstStyle/>
-          <a:p>
-            <a:pPr marL="0" indent="0">
-              <a:buNone/>
-            </a:pPr>
-            <a:r>
-              <a:rPr lang="en-IN" b="1" u="sng" dirty="0"/>
-              <a:t>1. Overall Accuracy</a:t>
-            </a:r>
-          </a:p>
-          <a:p>
-            <a:pPr marL="0" indent="0">
-              <a:buNone/>
-            </a:pPr>
-            <a:r>
-              <a:rPr lang="en-IN" sz="1600" dirty="0"/>
-              <a:t>Out of 25,000 prediction 24,630 are correct. This gives an accuracy of 98.52% indicating excellent performance.</a:t>
-            </a:r>
-          </a:p>
-          <a:p>
-            <a:pPr marL="0" indent="0">
-              <a:buNone/>
-            </a:pPr>
-            <a:r>
-              <a:rPr lang="en-IN" b="1" u="sng" dirty="0"/>
-              <a:t>2. Balanced Performance</a:t>
-            </a:r>
-          </a:p>
-          <a:p>
-            <a:pPr marL="0" indent="0">
-              <a:buNone/>
-            </a:pPr>
-            <a:r>
-              <a:rPr lang="en-US" sz="1600" b="1" dirty="0">
-                <a:latin typeface="Century Gothic (Headings)"/>
-              </a:rPr>
-              <a:t>-&gt; True Negatives (TN): 12,315</a:t>
-            </a:r>
-            <a:r>
-              <a:rPr lang="en-US" sz="1600" dirty="0">
-                <a:latin typeface="Century Gothic (Headings)"/>
-              </a:rPr>
-              <a:t> → Model correctly predicted class 0.</a:t>
-            </a:r>
-            <a:endParaRPr lang="en-IN" sz="1600" dirty="0">
-              <a:latin typeface="Century Gothic (Headings)"/>
-            </a:endParaRPr>
-          </a:p>
-          <a:p>
-            <a:pPr marL="0" lvl="0" indent="0" defTabSz="914400" eaLnBrk="0" fontAlgn="base" hangingPunct="0">
-              <a:spcBef>
-                <a:spcPct val="0"/>
-              </a:spcBef>
-              <a:spcAft>
-                <a:spcPct val="0"/>
-              </a:spcAft>
-              <a:buNone/>
-            </a:pPr>
-            <a:r>
-              <a:rPr kumimoji="0" lang="en-US" altLang="en-US" sz="1600" b="1" i="0" u="none" strike="noStrike" cap="none" normalizeH="0" baseline="0" dirty="0">
-                <a:ln>
-                  <a:noFill/>
-                </a:ln>
-                <a:solidFill>
-                  <a:schemeClr val="tx1"/>
-                </a:solidFill>
-                <a:effectLst/>
-                <a:latin typeface="Century Gothic (Headings)"/>
-              </a:rPr>
-              <a:t>-&gt; True Positives(TP):</a:t>
-            </a:r>
-            <a:r>
-              <a:rPr lang="en-US" altLang="en-US" sz="1600" b="1" dirty="0">
-                <a:latin typeface="Century Gothic (Headings)"/>
-              </a:rPr>
-              <a:t> 12,315</a:t>
-            </a:r>
-            <a:r>
-              <a:rPr lang="en-US" altLang="en-US" sz="1600" dirty="0">
-                <a:latin typeface="Century Gothic (Headings)"/>
-              </a:rPr>
-              <a:t> → Model correctly predicted class 1.</a:t>
-            </a:r>
-          </a:p>
-          <a:p>
-            <a:pPr marL="0" lvl="0" indent="0" defTabSz="914400" eaLnBrk="0" fontAlgn="base" hangingPunct="0">
-              <a:spcBef>
-                <a:spcPct val="0"/>
-              </a:spcBef>
-              <a:spcAft>
-                <a:spcPct val="0"/>
-              </a:spcAft>
-              <a:buNone/>
-            </a:pPr>
-            <a:r>
-              <a:rPr lang="en-US" altLang="en-US" sz="1600" b="1" dirty="0">
-                <a:latin typeface="Century Gothic (Headings)"/>
-              </a:rPr>
-              <a:t>-&gt; False Positives (FP): 185</a:t>
-            </a:r>
-            <a:r>
-              <a:rPr lang="en-US" altLang="en-US" sz="1600" dirty="0">
-                <a:latin typeface="Century Gothic (Headings)"/>
-              </a:rPr>
-              <a:t> → Model predicted 1 when the actual label was 0.</a:t>
-            </a:r>
-          </a:p>
-          <a:p>
-            <a:pPr marL="0" lvl="0" indent="0" defTabSz="914400" eaLnBrk="0" fontAlgn="base" hangingPunct="0">
-              <a:spcBef>
-                <a:spcPct val="0"/>
-              </a:spcBef>
-              <a:spcAft>
-                <a:spcPct val="0"/>
-              </a:spcAft>
-              <a:buNone/>
-            </a:pPr>
-            <a:r>
-              <a:rPr lang="en-US" altLang="en-US" sz="1600" b="1" dirty="0">
-                <a:latin typeface="Century Gothic (Headings)"/>
-              </a:rPr>
-              <a:t>-&gt; False Negatives (FN): 185</a:t>
-            </a:r>
-            <a:r>
-              <a:rPr lang="en-US" altLang="en-US" sz="1600" dirty="0">
-                <a:latin typeface="Century Gothic (Headings)"/>
-              </a:rPr>
-              <a:t> → Model </a:t>
-            </a:r>
-            <a:r>
-              <a:rPr kumimoji="0" lang="en-US" altLang="en-US" sz="1600" b="0" i="0" u="none" strike="noStrike" cap="none" normalizeH="0" baseline="0" dirty="0">
-                <a:ln>
-                  <a:noFill/>
-                </a:ln>
-                <a:solidFill>
-                  <a:schemeClr val="tx1"/>
-                </a:solidFill>
-                <a:effectLst/>
-                <a:latin typeface="Century Gothic (Headings)"/>
-              </a:rPr>
-              <a:t>predicted 0 when the actual label was 1.</a:t>
-            </a:r>
-          </a:p>
-          <a:p>
-            <a:pPr marL="0" indent="0">
-              <a:buNone/>
-            </a:pPr>
-            <a:endParaRPr lang="en-IN" sz="1600" dirty="0"/>
-          </a:p>
-        </p:txBody>
-      </p:sp>
     </p:spTree>
     <p:extLst>
       <p:ext uri="{BB962C8B-B14F-4D97-AF65-F5344CB8AC3E}">
@@ -6502,6 +6497,593 @@
           <p:cNvPr id="2" name="Title 1">
             <a:extLst>
               <a:ext uri="{FF2B5EF4-FFF2-40B4-BE49-F238E27FC236}">
+                <a16:creationId xmlns:a16="http://schemas.microsoft.com/office/drawing/2014/main" id="{481B93E5-184F-4935-91F6-EE0BDB9FC044}"/>
+              </a:ext>
+            </a:extLst>
+          </p:cNvPr>
+          <p:cNvSpPr>
+            <a:spLocks noGrp="1"/>
+          </p:cNvSpPr>
+          <p:nvPr>
+            <p:ph type="title"/>
+          </p:nvPr>
+        </p:nvSpPr>
+        <p:spPr>
+          <a:xfrm>
+            <a:off x="-1" y="197270"/>
+            <a:ext cx="9404723" cy="700265"/>
+          </a:xfrm>
+        </p:spPr>
+        <p:txBody>
+          <a:bodyPr/>
+          <a:lstStyle/>
+          <a:p>
+            <a:r>
+              <a:rPr lang="en-US" dirty="0">
+                <a:solidFill>
+                  <a:schemeClr val="accent1">
+                    <a:lumMod val="60000"/>
+                    <a:lumOff val="40000"/>
+                  </a:schemeClr>
+                </a:solidFill>
+                <a:latin typeface="Times New Roman"/>
+                <a:ea typeface="Calibri"/>
+                <a:cs typeface="Calibri"/>
+              </a:rPr>
+              <a:t>MODEL DEPLOYMENT</a:t>
+            </a:r>
+            <a:endParaRPr lang="en-IN" dirty="0"/>
+          </a:p>
+        </p:txBody>
+      </p:sp>
+      <p:pic>
+        <p:nvPicPr>
+          <p:cNvPr id="5" name="Picture 4">
+            <a:extLst>
+              <a:ext uri="{FF2B5EF4-FFF2-40B4-BE49-F238E27FC236}">
+                <a16:creationId xmlns:a16="http://schemas.microsoft.com/office/drawing/2014/main" id="{9EACF97D-F3CB-99C5-8D54-C2AFBA02E3BC}"/>
+              </a:ext>
+            </a:extLst>
+          </p:cNvPr>
+          <p:cNvPicPr>
+            <a:picLocks noChangeAspect="1"/>
+          </p:cNvPicPr>
+          <p:nvPr/>
+        </p:nvPicPr>
+        <p:blipFill>
+          <a:blip r:embed="rId2">
+            <a:extLst>
+              <a:ext uri="{28A0092B-C50C-407E-A947-70E740481C1C}">
+                <a14:useLocalDpi xmlns:a14="http://schemas.microsoft.com/office/drawing/2010/main" val="0"/>
+              </a:ext>
+            </a:extLst>
+          </a:blip>
+          <a:stretch>
+            <a:fillRect/>
+          </a:stretch>
+        </p:blipFill>
+        <p:spPr>
+          <a:xfrm>
+            <a:off x="0" y="1417323"/>
+            <a:ext cx="8527983" cy="2454440"/>
+          </a:xfrm>
+          <a:prstGeom prst="rect">
+            <a:avLst/>
+          </a:prstGeom>
+        </p:spPr>
+      </p:pic>
+      <p:pic>
+        <p:nvPicPr>
+          <p:cNvPr id="7" name="Picture 6">
+            <a:extLst>
+              <a:ext uri="{FF2B5EF4-FFF2-40B4-BE49-F238E27FC236}">
+                <a16:creationId xmlns:a16="http://schemas.microsoft.com/office/drawing/2014/main" id="{D0160A2F-2A2C-2FCA-95F3-5D79A76DA67B}"/>
+              </a:ext>
+            </a:extLst>
+          </p:cNvPr>
+          <p:cNvPicPr>
+            <a:picLocks noChangeAspect="1"/>
+          </p:cNvPicPr>
+          <p:nvPr/>
+        </p:nvPicPr>
+        <p:blipFill>
+          <a:blip r:embed="rId3">
+            <a:extLst>
+              <a:ext uri="{28A0092B-C50C-407E-A947-70E740481C1C}">
+                <a14:useLocalDpi xmlns:a14="http://schemas.microsoft.com/office/drawing/2010/main" val="0"/>
+              </a:ext>
+            </a:extLst>
+          </a:blip>
+          <a:stretch>
+            <a:fillRect/>
+          </a:stretch>
+        </p:blipFill>
+        <p:spPr>
+          <a:xfrm>
+            <a:off x="-1" y="3902264"/>
+            <a:ext cx="8527983" cy="2609227"/>
+          </a:xfrm>
+          <a:prstGeom prst="rect">
+            <a:avLst/>
+          </a:prstGeom>
+        </p:spPr>
+      </p:pic>
+      <p:sp>
+        <p:nvSpPr>
+          <p:cNvPr id="3" name="Title 1">
+            <a:extLst>
+              <a:ext uri="{FF2B5EF4-FFF2-40B4-BE49-F238E27FC236}">
+                <a16:creationId xmlns:a16="http://schemas.microsoft.com/office/drawing/2014/main" id="{291788A8-21F2-659D-C630-6D41AC4F4497}"/>
+              </a:ext>
+            </a:extLst>
+          </p:cNvPr>
+          <p:cNvSpPr txBox="1">
+            <a:spLocks/>
+          </p:cNvSpPr>
+          <p:nvPr/>
+        </p:nvSpPr>
+        <p:spPr>
+          <a:xfrm>
+            <a:off x="8527983" y="1278552"/>
+            <a:ext cx="3664017" cy="5160749"/>
+          </a:xfrm>
+          <a:prstGeom prst="rect">
+            <a:avLst/>
+          </a:prstGeom>
+        </p:spPr>
+        <p:txBody>
+          <a:bodyPr vert="horz" lIns="91440" tIns="45720" rIns="91440" bIns="45720" rtlCol="0" anchor="t">
+            <a:noAutofit/>
+          </a:bodyPr>
+          <a:lstStyle>
+            <a:lvl1pPr algn="l" defTabSz="457200" rtl="0" eaLnBrk="1" latinLnBrk="0" hangingPunct="1">
+              <a:spcBef>
+                <a:spcPct val="0"/>
+              </a:spcBef>
+              <a:buNone/>
+              <a:defRPr sz="4200" b="0" i="0" kern="1200">
+                <a:solidFill>
+                  <a:schemeClr val="tx2"/>
+                </a:solidFill>
+                <a:latin typeface="+mj-lt"/>
+                <a:ea typeface="+mj-ea"/>
+                <a:cs typeface="+mj-cs"/>
+              </a:defRPr>
+            </a:lvl1pPr>
+            <a:lvl2pPr eaLnBrk="1" hangingPunct="1">
+              <a:defRPr>
+                <a:solidFill>
+                  <a:schemeClr val="tx2"/>
+                </a:solidFill>
+              </a:defRPr>
+            </a:lvl2pPr>
+            <a:lvl3pPr eaLnBrk="1" hangingPunct="1">
+              <a:defRPr>
+                <a:solidFill>
+                  <a:schemeClr val="tx2"/>
+                </a:solidFill>
+              </a:defRPr>
+            </a:lvl3pPr>
+            <a:lvl4pPr eaLnBrk="1" hangingPunct="1">
+              <a:defRPr>
+                <a:solidFill>
+                  <a:schemeClr val="tx2"/>
+                </a:solidFill>
+              </a:defRPr>
+            </a:lvl4pPr>
+            <a:lvl5pPr eaLnBrk="1" hangingPunct="1">
+              <a:defRPr>
+                <a:solidFill>
+                  <a:schemeClr val="tx2"/>
+                </a:solidFill>
+              </a:defRPr>
+            </a:lvl5pPr>
+            <a:lvl6pPr eaLnBrk="1" hangingPunct="1">
+              <a:defRPr>
+                <a:solidFill>
+                  <a:schemeClr val="tx2"/>
+                </a:solidFill>
+              </a:defRPr>
+            </a:lvl6pPr>
+            <a:lvl7pPr eaLnBrk="1" hangingPunct="1">
+              <a:defRPr>
+                <a:solidFill>
+                  <a:schemeClr val="tx2"/>
+                </a:solidFill>
+              </a:defRPr>
+            </a:lvl7pPr>
+            <a:lvl8pPr eaLnBrk="1" hangingPunct="1">
+              <a:defRPr>
+                <a:solidFill>
+                  <a:schemeClr val="tx2"/>
+                </a:solidFill>
+              </a:defRPr>
+            </a:lvl8pPr>
+            <a:lvl9pPr eaLnBrk="1" hangingPunct="1">
+              <a:defRPr>
+                <a:solidFill>
+                  <a:schemeClr val="tx2"/>
+                </a:solidFill>
+              </a:defRPr>
+            </a:lvl9pPr>
+          </a:lstStyle>
+          <a:p>
+            <a:r>
+              <a:rPr lang="en-IN" sz="2400" b="1" u="sng" dirty="0"/>
+              <a:t>Steps to get the app</a:t>
+            </a:r>
+            <a:endParaRPr lang="en-IN" sz="100" dirty="0"/>
+          </a:p>
+          <a:p>
+            <a:pPr marL="285750" indent="-285750">
+              <a:lnSpc>
+                <a:spcPct val="150000"/>
+              </a:lnSpc>
+              <a:buFont typeface="Wingdings" panose="05000000000000000000" pitchFamily="2" charset="2"/>
+              <a:buChar char="Ø"/>
+            </a:pPr>
+            <a:r>
+              <a:rPr lang="en-IN" sz="1600" dirty="0"/>
+              <a:t>Activate the virtual environment.</a:t>
+            </a:r>
+          </a:p>
+          <a:p>
+            <a:pPr marL="285750" indent="-285750">
+              <a:lnSpc>
+                <a:spcPct val="150000"/>
+              </a:lnSpc>
+              <a:buFont typeface="Wingdings" panose="05000000000000000000" pitchFamily="2" charset="2"/>
+              <a:buChar char="Ø"/>
+            </a:pPr>
+            <a:r>
+              <a:rPr lang="en-IN" sz="1600" dirty="0"/>
+              <a:t>Install all the dependencies</a:t>
+            </a:r>
+          </a:p>
+          <a:p>
+            <a:pPr marL="285750" indent="-285750">
+              <a:lnSpc>
+                <a:spcPct val="150000"/>
+              </a:lnSpc>
+              <a:buFont typeface="Wingdings" panose="05000000000000000000" pitchFamily="2" charset="2"/>
+              <a:buChar char="Ø"/>
+            </a:pPr>
+            <a:r>
+              <a:rPr lang="en-IN" sz="1600" dirty="0"/>
+              <a:t>Run the streamlit app.</a:t>
+            </a:r>
+          </a:p>
+          <a:p>
+            <a:pPr marL="285750" indent="-285750">
+              <a:lnSpc>
+                <a:spcPct val="150000"/>
+              </a:lnSpc>
+              <a:buFont typeface="Wingdings" panose="05000000000000000000" pitchFamily="2" charset="2"/>
+              <a:buChar char="Ø"/>
+            </a:pPr>
+            <a:r>
+              <a:rPr lang="en-IN" sz="1600" dirty="0"/>
+              <a:t>Visit the site -&gt; </a:t>
+            </a:r>
+            <a:r>
+              <a:rPr lang="en-IN" sz="1600" dirty="0">
+                <a:hlinkClick r:id="rId4"/>
+              </a:rPr>
+              <a:t>Click Here to explore </a:t>
+            </a:r>
+            <a:r>
+              <a:rPr lang="en-IN" sz="1600" dirty="0" err="1">
+                <a:hlinkClick r:id="rId4"/>
+              </a:rPr>
+              <a:t>CineMod</a:t>
+            </a:r>
+            <a:r>
+              <a:rPr lang="en-IN" sz="1600" dirty="0">
+                <a:hlinkClick r:id="rId4"/>
+              </a:rPr>
+              <a:t> AI</a:t>
+            </a:r>
+            <a:endParaRPr lang="en-IN" sz="1600" dirty="0"/>
+          </a:p>
+          <a:p>
+            <a:pPr marL="285750" indent="-285750">
+              <a:lnSpc>
+                <a:spcPct val="150000"/>
+              </a:lnSpc>
+              <a:buFont typeface="Wingdings" panose="05000000000000000000" pitchFamily="2" charset="2"/>
+              <a:buChar char="Ø"/>
+            </a:pPr>
+            <a:r>
+              <a:rPr lang="en-IN" sz="1600" dirty="0"/>
+              <a:t>You can also check deployed app here -&gt; </a:t>
+            </a:r>
+            <a:r>
+              <a:rPr lang="en-IN" sz="1600" dirty="0" err="1">
+                <a:hlinkClick r:id="rId5"/>
+              </a:rPr>
+              <a:t>DeloyedApp</a:t>
+            </a:r>
+            <a:endParaRPr lang="en-IN" sz="1000" dirty="0"/>
+          </a:p>
+          <a:p>
+            <a:pPr marL="285750" indent="-285750">
+              <a:lnSpc>
+                <a:spcPct val="150000"/>
+              </a:lnSpc>
+              <a:buFont typeface="Wingdings" panose="05000000000000000000" pitchFamily="2" charset="2"/>
+              <a:buChar char="Ø"/>
+            </a:pPr>
+            <a:r>
+              <a:rPr lang="en-IN" sz="1600" dirty="0"/>
+              <a:t>You will first encounter the introduction for the app.</a:t>
+            </a:r>
+          </a:p>
+          <a:p>
+            <a:pPr marL="285750" indent="-285750">
+              <a:lnSpc>
+                <a:spcPct val="150000"/>
+              </a:lnSpc>
+              <a:buFont typeface="Wingdings" panose="05000000000000000000" pitchFamily="2" charset="2"/>
+              <a:buChar char="Ø"/>
+            </a:pPr>
+            <a:r>
+              <a:rPr lang="en-IN" sz="1600" dirty="0"/>
+              <a:t>Scroll down.</a:t>
+            </a:r>
+          </a:p>
+          <a:p>
+            <a:pPr marL="285750" indent="-285750">
+              <a:lnSpc>
+                <a:spcPct val="150000"/>
+              </a:lnSpc>
+              <a:buFont typeface="Wingdings" panose="05000000000000000000" pitchFamily="2" charset="2"/>
+              <a:buChar char="Ø"/>
+            </a:pPr>
+            <a:r>
+              <a:rPr lang="en-IN" sz="1600" dirty="0"/>
+              <a:t>Write a review between 20-25 words for better review output.</a:t>
+            </a:r>
+          </a:p>
+        </p:txBody>
+      </p:sp>
+    </p:spTree>
+    <p:extLst>
+      <p:ext uri="{BB962C8B-B14F-4D97-AF65-F5344CB8AC3E}">
+        <p14:creationId xmlns:p14="http://schemas.microsoft.com/office/powerpoint/2010/main" val="3766687860"/>
+      </p:ext>
+    </p:extLst>
+  </p:cSld>
+  <p:clrMapOvr>
+    <a:masterClrMapping/>
+  </p:clrMapOvr>
+</p:sld>
+</file>
+
+<file path=ppt/slides/slide12.xml><?xml version="1.0" encoding="utf-8"?>
+<p:sld xmlns:a="http://schemas.openxmlformats.org/drawingml/2006/main" xmlns:r="http://schemas.openxmlformats.org/officeDocument/2006/relationships" xmlns:p="http://schemas.openxmlformats.org/presentationml/2006/main">
+  <p:cSld>
+    <p:spTree>
+      <p:nvGrpSpPr>
+        <p:cNvPr id="1" name="">
+          <a:extLst>
+            <a:ext uri="{FF2B5EF4-FFF2-40B4-BE49-F238E27FC236}">
+              <a16:creationId xmlns:a16="http://schemas.microsoft.com/office/drawing/2014/main" id="{01A58214-EB64-515D-D309-20F5BFC4F623}"/>
+            </a:ext>
+          </a:extLst>
+        </p:cNvPr>
+        <p:cNvGrpSpPr/>
+        <p:nvPr/>
+      </p:nvGrpSpPr>
+      <p:grpSpPr>
+        <a:xfrm>
+          <a:off x="0" y="0"/>
+          <a:ext cx="0" cy="0"/>
+          <a:chOff x="0" y="0"/>
+          <a:chExt cx="0" cy="0"/>
+        </a:xfrm>
+      </p:grpSpPr>
+      <p:sp>
+        <p:nvSpPr>
+          <p:cNvPr id="4" name="Title 3">
+            <a:extLst>
+              <a:ext uri="{FF2B5EF4-FFF2-40B4-BE49-F238E27FC236}">
+                <a16:creationId xmlns:a16="http://schemas.microsoft.com/office/drawing/2014/main" id="{33249F93-79D6-B8D2-DD9B-E8FECC060D61}"/>
+              </a:ext>
+            </a:extLst>
+          </p:cNvPr>
+          <p:cNvSpPr>
+            <a:spLocks noGrp="1"/>
+          </p:cNvSpPr>
+          <p:nvPr>
+            <p:ph type="title"/>
+          </p:nvPr>
+        </p:nvSpPr>
+        <p:spPr>
+          <a:xfrm>
+            <a:off x="280352" y="250588"/>
+            <a:ext cx="5013544" cy="856318"/>
+          </a:xfrm>
+        </p:spPr>
+        <p:txBody>
+          <a:bodyPr/>
+          <a:lstStyle/>
+          <a:p>
+            <a:r>
+              <a:rPr lang="en-IN" dirty="0">
+                <a:solidFill>
+                  <a:schemeClr val="accent1">
+                    <a:lumMod val="60000"/>
+                    <a:lumOff val="40000"/>
+                  </a:schemeClr>
+                </a:solidFill>
+              </a:rPr>
+              <a:t>Challenges Faced</a:t>
+            </a:r>
+          </a:p>
+        </p:txBody>
+      </p:sp>
+      <p:sp>
+        <p:nvSpPr>
+          <p:cNvPr id="7" name="TextBox 6">
+            <a:extLst>
+              <a:ext uri="{FF2B5EF4-FFF2-40B4-BE49-F238E27FC236}">
+                <a16:creationId xmlns:a16="http://schemas.microsoft.com/office/drawing/2014/main" id="{B705F6A4-8525-5B57-22F4-1D674871EEA3}"/>
+              </a:ext>
+            </a:extLst>
+          </p:cNvPr>
+          <p:cNvSpPr txBox="1"/>
+          <p:nvPr/>
+        </p:nvSpPr>
+        <p:spPr>
+          <a:xfrm>
+            <a:off x="280352" y="1256396"/>
+            <a:ext cx="11606848" cy="3970318"/>
+          </a:xfrm>
+          <a:prstGeom prst="rect">
+            <a:avLst/>
+          </a:prstGeom>
+          <a:noFill/>
+        </p:spPr>
+        <p:txBody>
+          <a:bodyPr wrap="square">
+            <a:spAutoFit/>
+          </a:bodyPr>
+          <a:lstStyle/>
+          <a:p>
+            <a:pPr marL="342900" indent="-342900">
+              <a:buFont typeface="+mj-lt"/>
+              <a:buAutoNum type="arabicPeriod"/>
+            </a:pPr>
+            <a:r>
+              <a:rPr lang="en-IN" b="1" dirty="0"/>
+              <a:t>Embedding Layer (300D)</a:t>
+            </a:r>
+            <a:r>
+              <a:rPr lang="en-IN" dirty="0"/>
+              <a:t>: Capturing semantic relationships without exceeding memory limits; required tuning vector size and vocabulary coverage.</a:t>
+            </a:r>
+          </a:p>
+          <a:p>
+            <a:pPr marL="342900" indent="-342900">
+              <a:buFont typeface="+mj-lt"/>
+              <a:buAutoNum type="arabicPeriod"/>
+            </a:pPr>
+            <a:endParaRPr lang="en-IN" dirty="0"/>
+          </a:p>
+          <a:p>
+            <a:pPr marL="342900" indent="-342900">
+              <a:buFont typeface="+mj-lt"/>
+              <a:buAutoNum type="arabicPeriod"/>
+            </a:pPr>
+            <a:r>
+              <a:rPr lang="en-IN" b="1" dirty="0"/>
+              <a:t>Bidirectional GRU (128 Units)</a:t>
+            </a:r>
+            <a:r>
+              <a:rPr lang="en-IN" dirty="0"/>
+              <a:t>: Improved contextual understanding but increased training time and required careful gradient management.</a:t>
+            </a:r>
+          </a:p>
+          <a:p>
+            <a:pPr marL="342900" indent="-342900">
+              <a:buFont typeface="+mj-lt"/>
+              <a:buAutoNum type="arabicPeriod"/>
+            </a:pPr>
+            <a:endParaRPr lang="en-IN" dirty="0"/>
+          </a:p>
+          <a:p>
+            <a:pPr marL="342900" indent="-342900">
+              <a:buFont typeface="+mj-lt"/>
+              <a:buAutoNum type="arabicPeriod"/>
+            </a:pPr>
+            <a:r>
+              <a:rPr lang="en-IN" b="1" dirty="0"/>
+              <a:t>Preprocessing Consistency</a:t>
+            </a:r>
+            <a:r>
+              <a:rPr lang="en-IN" dirty="0"/>
+              <a:t>: Ensuring identical tokenization, padding, and word-index mapping between training and inference stages to maintain model accuracy.</a:t>
+            </a:r>
+          </a:p>
+          <a:p>
+            <a:pPr marL="342900" indent="-342900">
+              <a:buFont typeface="+mj-lt"/>
+              <a:buAutoNum type="arabicPeriod"/>
+            </a:pPr>
+            <a:endParaRPr lang="en-IN" dirty="0"/>
+          </a:p>
+          <a:p>
+            <a:pPr marL="342900" indent="-342900">
+              <a:buFont typeface="+mj-lt"/>
+              <a:buAutoNum type="arabicPeriod"/>
+            </a:pPr>
+            <a:r>
+              <a:rPr lang="en-IN" b="1" dirty="0"/>
+              <a:t>Out-of-Vocabulary Handling</a:t>
+            </a:r>
+            <a:r>
+              <a:rPr lang="en-IN" dirty="0"/>
+              <a:t>: Managing unseen or rare words during prediction with fallback embeddings or masking strategies.</a:t>
+            </a:r>
+          </a:p>
+          <a:p>
+            <a:pPr marL="342900" indent="-342900">
+              <a:buFont typeface="+mj-lt"/>
+              <a:buAutoNum type="arabicPeriod"/>
+            </a:pPr>
+            <a:endParaRPr lang="en-IN" dirty="0"/>
+          </a:p>
+          <a:p>
+            <a:pPr marL="342900" indent="-342900">
+              <a:buFont typeface="+mj-lt"/>
+              <a:buAutoNum type="arabicPeriod"/>
+            </a:pPr>
+            <a:r>
+              <a:rPr lang="en-IN" b="1" dirty="0"/>
+              <a:t>Exception Handling</a:t>
+            </a:r>
+            <a:r>
+              <a:rPr lang="en-IN" dirty="0"/>
+              <a:t>: Building robust error handling for invalid inputs, empty reviews, and unexpected user behaviour to ensure smooth web app performance.</a:t>
+            </a:r>
+          </a:p>
+        </p:txBody>
+      </p:sp>
+    </p:spTree>
+    <p:extLst>
+      <p:ext uri="{BB962C8B-B14F-4D97-AF65-F5344CB8AC3E}">
+        <p14:creationId xmlns:p14="http://schemas.microsoft.com/office/powerpoint/2010/main" val="4118531347"/>
+      </p:ext>
+    </p:extLst>
+  </p:cSld>
+  <p:clrMapOvr>
+    <a:masterClrMapping/>
+  </p:clrMapOvr>
+</p:sld>
+</file>
+
+<file path=ppt/slides/slide13.xml><?xml version="1.0" encoding="utf-8"?>
+<p:sld xmlns:a="http://schemas.openxmlformats.org/drawingml/2006/main" xmlns:r="http://schemas.openxmlformats.org/officeDocument/2006/relationships" xmlns:p="http://schemas.openxmlformats.org/presentationml/2006/main">
+  <p:cSld>
+    <p:spTree>
+      <p:nvGrpSpPr>
+        <p:cNvPr id="1" name=""/>
+        <p:cNvGrpSpPr/>
+        <p:nvPr/>
+      </p:nvGrpSpPr>
+      <p:grpSpPr>
+        <a:xfrm>
+          <a:off x="0" y="0"/>
+          <a:ext cx="0" cy="0"/>
+          <a:chOff x="0" y="0"/>
+          <a:chExt cx="0" cy="0"/>
+        </a:xfrm>
+      </p:grpSpPr>
+      <p:sp>
+        <p:nvSpPr>
+          <p:cNvPr id="2" name="Title 1">
+            <a:extLst>
+              <a:ext uri="{FF2B5EF4-FFF2-40B4-BE49-F238E27FC236}">
                 <a16:creationId xmlns:a16="http://schemas.microsoft.com/office/drawing/2014/main" id="{A7281991-FD84-4B30-A527-658DC8534EC3}"/>
               </a:ext>
             </a:extLst>
@@ -6628,23 +7210,7 @@
                 <a:ea typeface="+mn-lt"/>
                 <a:cs typeface="+mn-lt"/>
               </a:rPr>
-              <a:t>To bridge the gap between user expression and automated sentiment detection using TensorFlow and </a:t>
-            </a:r>
-            <a:r>
-              <a:rPr lang="en-US" sz="1800" dirty="0" err="1">
-                <a:latin typeface="Times New Roman"/>
-                <a:ea typeface="+mn-lt"/>
-                <a:cs typeface="+mn-lt"/>
-              </a:rPr>
-              <a:t>Streamlit</a:t>
-            </a:r>
-            <a:r>
-              <a:rPr lang="en-US" sz="1800" dirty="0">
-                <a:latin typeface="Times New Roman"/>
-                <a:ea typeface="+mn-lt"/>
-                <a:cs typeface="+mn-lt"/>
-              </a:rPr>
-              <a:t>.</a:t>
+              <a:t>To bridge the gap between user expression and automated sentiment detection using TensorFlow and Streamlit.</a:t>
             </a:r>
           </a:p>
           <a:p>
@@ -6699,276 +7265,7 @@
 </p:sld>
 </file>
 
-<file path=ppt/slides/slide12.xml><?xml version="1.0" encoding="utf-8"?>
-<p:sld xmlns:a="http://schemas.openxmlformats.org/drawingml/2006/main" xmlns:r="http://schemas.openxmlformats.org/officeDocument/2006/relationships" xmlns:p="http://schemas.openxmlformats.org/presentationml/2006/main">
-  <p:cSld>
-    <p:spTree>
-      <p:nvGrpSpPr>
-        <p:cNvPr id="1" name=""/>
-        <p:cNvGrpSpPr/>
-        <p:nvPr/>
-      </p:nvGrpSpPr>
-      <p:grpSpPr>
-        <a:xfrm>
-          <a:off x="0" y="0"/>
-          <a:ext cx="0" cy="0"/>
-          <a:chOff x="0" y="0"/>
-          <a:chExt cx="0" cy="0"/>
-        </a:xfrm>
-      </p:grpSpPr>
-      <p:sp>
-        <p:nvSpPr>
-          <p:cNvPr id="2" name="Title 1">
-            <a:extLst>
-              <a:ext uri="{FF2B5EF4-FFF2-40B4-BE49-F238E27FC236}">
-                <a16:creationId xmlns:a16="http://schemas.microsoft.com/office/drawing/2014/main" id="{481B93E5-184F-4935-91F6-EE0BDB9FC044}"/>
-              </a:ext>
-            </a:extLst>
-          </p:cNvPr>
-          <p:cNvSpPr>
-            <a:spLocks noGrp="1"/>
-          </p:cNvSpPr>
-          <p:nvPr>
-            <p:ph type="title"/>
-          </p:nvPr>
-        </p:nvSpPr>
-        <p:spPr>
-          <a:xfrm>
-            <a:off x="646111" y="452718"/>
-            <a:ext cx="9404723" cy="700265"/>
-          </a:xfrm>
-        </p:spPr>
-        <p:txBody>
-          <a:bodyPr/>
-          <a:lstStyle/>
-          <a:p>
-            <a:r>
-              <a:rPr lang="en-US" dirty="0">
-                <a:solidFill>
-                  <a:schemeClr val="accent1">
-                    <a:lumMod val="60000"/>
-                    <a:lumOff val="40000"/>
-                  </a:schemeClr>
-                </a:solidFill>
-                <a:latin typeface="Times New Roman"/>
-                <a:ea typeface="Calibri"/>
-                <a:cs typeface="Calibri"/>
-              </a:rPr>
-              <a:t>MODEL DEPLOYMENT</a:t>
-            </a:r>
-            <a:endParaRPr lang="en-IN" dirty="0"/>
-          </a:p>
-        </p:txBody>
-      </p:sp>
-      <p:pic>
-        <p:nvPicPr>
-          <p:cNvPr id="5" name="Picture 4">
-            <a:extLst>
-              <a:ext uri="{FF2B5EF4-FFF2-40B4-BE49-F238E27FC236}">
-                <a16:creationId xmlns:a16="http://schemas.microsoft.com/office/drawing/2014/main" id="{9EACF97D-F3CB-99C5-8D54-C2AFBA02E3BC}"/>
-              </a:ext>
-            </a:extLst>
-          </p:cNvPr>
-          <p:cNvPicPr>
-            <a:picLocks noChangeAspect="1"/>
-          </p:cNvPicPr>
-          <p:nvPr/>
-        </p:nvPicPr>
-        <p:blipFill>
-          <a:blip r:embed="rId2">
-            <a:extLst>
-              <a:ext uri="{28A0092B-C50C-407E-A947-70E740481C1C}">
-                <a14:useLocalDpi xmlns:a14="http://schemas.microsoft.com/office/drawing/2010/main" val="0"/>
-              </a:ext>
-            </a:extLst>
-          </a:blip>
-          <a:stretch>
-            <a:fillRect/>
-          </a:stretch>
-        </p:blipFill>
-        <p:spPr>
-          <a:xfrm>
-            <a:off x="745369" y="1347539"/>
-            <a:ext cx="11074454" cy="2454440"/>
-          </a:xfrm>
-          <a:prstGeom prst="rect">
-            <a:avLst/>
-          </a:prstGeom>
-        </p:spPr>
-      </p:pic>
-      <p:pic>
-        <p:nvPicPr>
-          <p:cNvPr id="7" name="Picture 6">
-            <a:extLst>
-              <a:ext uri="{FF2B5EF4-FFF2-40B4-BE49-F238E27FC236}">
-                <a16:creationId xmlns:a16="http://schemas.microsoft.com/office/drawing/2014/main" id="{D0160A2F-2A2C-2FCA-95F3-5D79A76DA67B}"/>
-              </a:ext>
-            </a:extLst>
-          </p:cNvPr>
-          <p:cNvPicPr>
-            <a:picLocks noChangeAspect="1"/>
-          </p:cNvPicPr>
-          <p:nvPr/>
-        </p:nvPicPr>
-        <p:blipFill>
-          <a:blip r:embed="rId3">
-            <a:extLst>
-              <a:ext uri="{28A0092B-C50C-407E-A947-70E740481C1C}">
-                <a14:useLocalDpi xmlns:a14="http://schemas.microsoft.com/office/drawing/2010/main" val="0"/>
-              </a:ext>
-            </a:extLst>
-          </a:blip>
-          <a:stretch>
-            <a:fillRect/>
-          </a:stretch>
-        </p:blipFill>
-        <p:spPr>
-          <a:xfrm>
-            <a:off x="745368" y="3850104"/>
-            <a:ext cx="11074453" cy="2609227"/>
-          </a:xfrm>
-          <a:prstGeom prst="rect">
-            <a:avLst/>
-          </a:prstGeom>
-        </p:spPr>
-      </p:pic>
-      <p:sp>
-        <p:nvSpPr>
-          <p:cNvPr id="11" name="Title 1">
-            <a:hlinkClick r:id="rId4"/>
-            <a:extLst>
-              <a:ext uri="{FF2B5EF4-FFF2-40B4-BE49-F238E27FC236}">
-                <a16:creationId xmlns:a16="http://schemas.microsoft.com/office/drawing/2014/main" id="{0A8B1013-568A-CDC4-1711-9784F0D05AE7}"/>
-              </a:ext>
-            </a:extLst>
-          </p:cNvPr>
-          <p:cNvSpPr txBox="1">
-            <a:spLocks/>
-          </p:cNvSpPr>
-          <p:nvPr/>
-        </p:nvSpPr>
-        <p:spPr>
-          <a:xfrm>
-            <a:off x="9621671" y="6511491"/>
-            <a:ext cx="2397075" cy="346509"/>
-          </a:xfrm>
-          <a:prstGeom prst="rect">
-            <a:avLst/>
-          </a:prstGeom>
-        </p:spPr>
-        <p:txBody>
-          <a:bodyPr vert="horz" lIns="91440" tIns="45720" rIns="91440" bIns="45720" rtlCol="0" anchor="t">
-            <a:noAutofit/>
-          </a:bodyPr>
-          <a:lstStyle>
-            <a:lvl1pPr algn="l" defTabSz="457200" rtl="0" eaLnBrk="1" latinLnBrk="0" hangingPunct="1">
-              <a:spcBef>
-                <a:spcPct val="0"/>
-              </a:spcBef>
-              <a:buNone/>
-              <a:defRPr sz="4200" b="0" i="0" kern="1200">
-                <a:solidFill>
-                  <a:schemeClr val="tx2"/>
-                </a:solidFill>
-                <a:latin typeface="+mj-lt"/>
-                <a:ea typeface="+mj-ea"/>
-                <a:cs typeface="+mj-cs"/>
-              </a:defRPr>
-            </a:lvl1pPr>
-            <a:lvl2pPr eaLnBrk="1" hangingPunct="1">
-              <a:defRPr>
-                <a:solidFill>
-                  <a:schemeClr val="tx2"/>
-                </a:solidFill>
-              </a:defRPr>
-            </a:lvl2pPr>
-            <a:lvl3pPr eaLnBrk="1" hangingPunct="1">
-              <a:defRPr>
-                <a:solidFill>
-                  <a:schemeClr val="tx2"/>
-                </a:solidFill>
-              </a:defRPr>
-            </a:lvl3pPr>
-            <a:lvl4pPr eaLnBrk="1" hangingPunct="1">
-              <a:defRPr>
-                <a:solidFill>
-                  <a:schemeClr val="tx2"/>
-                </a:solidFill>
-              </a:defRPr>
-            </a:lvl4pPr>
-            <a:lvl5pPr eaLnBrk="1" hangingPunct="1">
-              <a:defRPr>
-                <a:solidFill>
-                  <a:schemeClr val="tx2"/>
-                </a:solidFill>
-              </a:defRPr>
-            </a:lvl5pPr>
-            <a:lvl6pPr eaLnBrk="1" hangingPunct="1">
-              <a:defRPr>
-                <a:solidFill>
-                  <a:schemeClr val="tx2"/>
-                </a:solidFill>
-              </a:defRPr>
-            </a:lvl6pPr>
-            <a:lvl7pPr eaLnBrk="1" hangingPunct="1">
-              <a:defRPr>
-                <a:solidFill>
-                  <a:schemeClr val="tx2"/>
-                </a:solidFill>
-              </a:defRPr>
-            </a:lvl7pPr>
-            <a:lvl8pPr eaLnBrk="1" hangingPunct="1">
-              <a:defRPr>
-                <a:solidFill>
-                  <a:schemeClr val="tx2"/>
-                </a:solidFill>
-              </a:defRPr>
-            </a:lvl8pPr>
-            <a:lvl9pPr eaLnBrk="1" hangingPunct="1">
-              <a:defRPr>
-                <a:solidFill>
-                  <a:schemeClr val="tx2"/>
-                </a:solidFill>
-              </a:defRPr>
-            </a:lvl9pPr>
-          </a:lstStyle>
-          <a:p>
-            <a:r>
-              <a:rPr lang="en-IN" sz="1050" dirty="0">
-                <a:hlinkClick r:id="rId4"/>
-              </a:rPr>
-              <a:t>Click Here to explore </a:t>
-            </a:r>
-            <a:r>
-              <a:rPr lang="en-IN" sz="1050" dirty="0" err="1">
-                <a:hlinkClick r:id="rId4"/>
-              </a:rPr>
-              <a:t>CineMod</a:t>
-            </a:r>
-            <a:r>
-              <a:rPr lang="en-IN" sz="1050" dirty="0">
-                <a:hlinkClick r:id="rId4"/>
-              </a:rPr>
-              <a:t> AI</a:t>
-            </a:r>
-            <a:endParaRPr lang="en-IN" sz="1050" dirty="0"/>
-          </a:p>
-        </p:txBody>
-      </p:sp>
-    </p:spTree>
-    <p:extLst>
-      <p:ext uri="{BB962C8B-B14F-4D97-AF65-F5344CB8AC3E}">
-        <p14:creationId xmlns:p14="http://schemas.microsoft.com/office/powerpoint/2010/main" val="3766687860"/>
-      </p:ext>
-    </p:extLst>
-  </p:cSld>
-  <p:clrMapOvr>
-    <a:masterClrMapping/>
-  </p:clrMapOvr>
-</p:sld>
-</file>
-
-<file path=ppt/slides/slide13.xml><?xml version="1.0" encoding="utf-8"?>
+<file path=ppt/slides/slide14.xml><?xml version="1.0" encoding="utf-8"?>
 <p:sld xmlns:a="http://schemas.openxmlformats.org/drawingml/2006/main" xmlns:r="http://schemas.openxmlformats.org/officeDocument/2006/relationships" xmlns:p="http://schemas.openxmlformats.org/presentationml/2006/main">
   <p:cSld>
     <p:spTree>
@@ -7405,23 +7702,7 @@
             </a:pPr>
             <a:r>
               <a:rPr lang="en-US" sz="1600" dirty="0"/>
-              <a:t>Built with </a:t>
-            </a:r>
-            <a:r>
-              <a:rPr lang="en-US" sz="1600" dirty="0" err="1"/>
-              <a:t>Streamlit</a:t>
-            </a:r>
-            <a:r>
-              <a:rPr lang="en-US" sz="1600" dirty="0"/>
-              <a:t> for a seamless UI and TensorFlow/</a:t>
-            </a:r>
-            <a:r>
-              <a:rPr lang="en-US" sz="1600" dirty="0" err="1"/>
-              <a:t>Keras</a:t>
-            </a:r>
-            <a:r>
-              <a:rPr lang="en-US" sz="1600" dirty="0"/>
-              <a:t> for backend intelligence, the platform provides real-time predictions along with an interactive confidence meter, animated visuals, and a user-centric design to maximize engagement.</a:t>
+              <a:t>Built with Streamlit for a seamless UI and TensorFlow/Keras for backend intelligence, the platform provides real-time predictions along with an interactive confidence meter, animated visuals, and a user-centric design to maximize engagement.</a:t>
             </a:r>
             <a:endParaRPr lang="en-IN" sz="1600" dirty="0"/>
           </a:p>
@@ -8238,7 +8519,7 @@
         <p:spPr>
           <a:xfrm>
             <a:off x="727674" y="1234962"/>
-            <a:ext cx="10639762" cy="5623038"/>
+            <a:ext cx="10389505" cy="5623038"/>
           </a:xfrm>
           <a:prstGeom prst="rect">
             <a:avLst/>
@@ -8546,7 +8827,12 @@
             <p:ph type="title"/>
           </p:nvPr>
         </p:nvSpPr>
-        <p:spPr/>
+        <p:spPr>
+          <a:xfrm>
+            <a:off x="1" y="85649"/>
+            <a:ext cx="4985886" cy="751750"/>
+          </a:xfrm>
+        </p:spPr>
         <p:txBody>
           <a:bodyPr/>
           <a:lstStyle/>
@@ -8604,8 +8890,8 @@
         </p:blipFill>
         <p:spPr bwMode="auto">
           <a:xfrm>
-            <a:off x="6077707" y="1155700"/>
-            <a:ext cx="6054934" cy="5384800"/>
+            <a:off x="6137066" y="933651"/>
+            <a:ext cx="6054934" cy="4273258"/>
           </a:xfrm>
           <a:prstGeom prst="rect">
             <a:avLst/>
@@ -8624,51 +8910,304 @@
       </p:pic>
       <p:pic>
         <p:nvPicPr>
-          <p:cNvPr id="2052" name="Picture 4">
+          <p:cNvPr id="4" name="Picture 3">
             <a:extLst>
               <a:ext uri="{FF2B5EF4-FFF2-40B4-BE49-F238E27FC236}">
-                <a16:creationId xmlns:a16="http://schemas.microsoft.com/office/drawing/2014/main" id="{54836DA1-7740-45BC-9E16-3498F1096E57}"/>
+                <a16:creationId xmlns:a16="http://schemas.microsoft.com/office/drawing/2014/main" id="{C9D82212-C201-ED56-96F8-DED1C81AC856}"/>
               </a:ext>
             </a:extLst>
           </p:cNvPr>
           <p:cNvPicPr>
-            <a:picLocks noChangeAspect="1" noChangeArrowheads="1"/>
+            <a:picLocks noChangeAspect="1"/>
           </p:cNvPicPr>
           <p:nvPr/>
         </p:nvPicPr>
         <p:blipFill>
-          <a:blip r:embed="rId3">
-            <a:extLst>
-              <a:ext uri="{28A0092B-C50C-407E-A947-70E740481C1C}">
-                <a14:useLocalDpi xmlns:a14="http://schemas.microsoft.com/office/drawing/2010/main" val="0"/>
-              </a:ext>
-            </a:extLst>
-          </a:blip>
-          <a:srcRect/>
+          <a:blip r:embed="rId3"/>
           <a:stretch>
             <a:fillRect/>
           </a:stretch>
         </p:blipFill>
-        <p:spPr bwMode="auto">
+        <p:spPr>
           <a:xfrm>
-            <a:off x="0" y="1193891"/>
-            <a:ext cx="5718103" cy="5384800"/>
+            <a:off x="-2" y="933650"/>
+            <a:ext cx="5813659" cy="4273259"/>
           </a:xfrm>
           <a:prstGeom prst="rect">
             <a:avLst/>
           </a:prstGeom>
-          <a:noFill/>
-          <a:extLst>
-            <a:ext uri="{909E8E84-426E-40DD-AFC4-6F175D3DCCD1}">
-              <a14:hiddenFill xmlns:a14="http://schemas.microsoft.com/office/drawing/2010/main">
-                <a:solidFill>
-                  <a:srgbClr val="FFFFFF"/>
-                </a:solidFill>
-              </a14:hiddenFill>
-            </a:ext>
-          </a:extLst>
         </p:spPr>
       </p:pic>
+      <p:sp>
+        <p:nvSpPr>
+          <p:cNvPr id="5" name="Title 1">
+            <a:extLst>
+              <a:ext uri="{FF2B5EF4-FFF2-40B4-BE49-F238E27FC236}">
+                <a16:creationId xmlns:a16="http://schemas.microsoft.com/office/drawing/2014/main" id="{8D45999A-1C53-6CE5-A028-CEE01EBE26FE}"/>
+              </a:ext>
+            </a:extLst>
+          </p:cNvPr>
+          <p:cNvSpPr txBox="1">
+            <a:spLocks/>
+          </p:cNvSpPr>
+          <p:nvPr/>
+        </p:nvSpPr>
+        <p:spPr>
+          <a:xfrm>
+            <a:off x="-2" y="5442462"/>
+            <a:ext cx="5813659" cy="1329890"/>
+          </a:xfrm>
+          <a:prstGeom prst="rect">
+            <a:avLst/>
+          </a:prstGeom>
+        </p:spPr>
+        <p:txBody>
+          <a:bodyPr vert="horz" lIns="91440" tIns="45720" rIns="91440" bIns="45720" rtlCol="0" anchor="t">
+            <a:noAutofit/>
+          </a:bodyPr>
+          <a:lstStyle>
+            <a:lvl1pPr algn="l" defTabSz="457200" rtl="0" eaLnBrk="1" latinLnBrk="0" hangingPunct="1">
+              <a:spcBef>
+                <a:spcPct val="0"/>
+              </a:spcBef>
+              <a:buNone/>
+              <a:defRPr sz="4200" b="0" i="0" kern="1200">
+                <a:solidFill>
+                  <a:schemeClr val="tx2"/>
+                </a:solidFill>
+                <a:latin typeface="+mj-lt"/>
+                <a:ea typeface="+mj-ea"/>
+                <a:cs typeface="+mj-cs"/>
+              </a:defRPr>
+            </a:lvl1pPr>
+            <a:lvl2pPr eaLnBrk="1" hangingPunct="1">
+              <a:defRPr>
+                <a:solidFill>
+                  <a:schemeClr val="tx2"/>
+                </a:solidFill>
+              </a:defRPr>
+            </a:lvl2pPr>
+            <a:lvl3pPr eaLnBrk="1" hangingPunct="1">
+              <a:defRPr>
+                <a:solidFill>
+                  <a:schemeClr val="tx2"/>
+                </a:solidFill>
+              </a:defRPr>
+            </a:lvl3pPr>
+            <a:lvl4pPr eaLnBrk="1" hangingPunct="1">
+              <a:defRPr>
+                <a:solidFill>
+                  <a:schemeClr val="tx2"/>
+                </a:solidFill>
+              </a:defRPr>
+            </a:lvl4pPr>
+            <a:lvl5pPr eaLnBrk="1" hangingPunct="1">
+              <a:defRPr>
+                <a:solidFill>
+                  <a:schemeClr val="tx2"/>
+                </a:solidFill>
+              </a:defRPr>
+            </a:lvl5pPr>
+            <a:lvl6pPr eaLnBrk="1" hangingPunct="1">
+              <a:defRPr>
+                <a:solidFill>
+                  <a:schemeClr val="tx2"/>
+                </a:solidFill>
+              </a:defRPr>
+            </a:lvl6pPr>
+            <a:lvl7pPr eaLnBrk="1" hangingPunct="1">
+              <a:defRPr>
+                <a:solidFill>
+                  <a:schemeClr val="tx2"/>
+                </a:solidFill>
+              </a:defRPr>
+            </a:lvl7pPr>
+            <a:lvl8pPr eaLnBrk="1" hangingPunct="1">
+              <a:defRPr>
+                <a:solidFill>
+                  <a:schemeClr val="tx2"/>
+                </a:solidFill>
+              </a:defRPr>
+            </a:lvl8pPr>
+            <a:lvl9pPr eaLnBrk="1" hangingPunct="1">
+              <a:defRPr>
+                <a:solidFill>
+                  <a:schemeClr val="tx2"/>
+                </a:solidFill>
+              </a:defRPr>
+            </a:lvl9pPr>
+          </a:lstStyle>
+          <a:p>
+            <a:pPr marL="285750" indent="-285750">
+              <a:buFont typeface="Wingdings" panose="05000000000000000000" pitchFamily="2" charset="2"/>
+              <a:buChar char="ü"/>
+            </a:pPr>
+            <a:r>
+              <a:rPr lang="en-IN" sz="1600" dirty="0">
+                <a:solidFill>
+                  <a:schemeClr val="accent1">
+                    <a:lumMod val="60000"/>
+                    <a:lumOff val="40000"/>
+                  </a:schemeClr>
+                </a:solidFill>
+              </a:rPr>
+              <a:t>This image shows us the maximum repeated word present in the reviews after removing the stop-words.</a:t>
+            </a:r>
+          </a:p>
+          <a:p>
+            <a:pPr marL="285750" indent="-285750">
+              <a:buFont typeface="Wingdings" panose="05000000000000000000" pitchFamily="2" charset="2"/>
+              <a:buChar char="ü"/>
+            </a:pPr>
+            <a:r>
+              <a:rPr lang="en-IN" sz="1600" dirty="0">
+                <a:solidFill>
+                  <a:schemeClr val="accent1">
+                    <a:lumMod val="60000"/>
+                    <a:lumOff val="40000"/>
+                  </a:schemeClr>
+                </a:solidFill>
+              </a:rPr>
+              <a:t>The most of the repeated words can be seen are [‘film’, ‘movie’, ‘see’, ‘story’]</a:t>
+            </a:r>
+          </a:p>
+        </p:txBody>
+      </p:sp>
+      <p:sp>
+        <p:nvSpPr>
+          <p:cNvPr id="6" name="Title 1">
+            <a:extLst>
+              <a:ext uri="{FF2B5EF4-FFF2-40B4-BE49-F238E27FC236}">
+                <a16:creationId xmlns:a16="http://schemas.microsoft.com/office/drawing/2014/main" id="{F682A7AF-AA38-6C5A-FAFF-AA205F092822}"/>
+              </a:ext>
+            </a:extLst>
+          </p:cNvPr>
+          <p:cNvSpPr txBox="1">
+            <a:spLocks/>
+          </p:cNvSpPr>
+          <p:nvPr/>
+        </p:nvSpPr>
+        <p:spPr>
+          <a:xfrm>
+            <a:off x="6096000" y="5428381"/>
+            <a:ext cx="6096000" cy="1329890"/>
+          </a:xfrm>
+          <a:prstGeom prst="rect">
+            <a:avLst/>
+          </a:prstGeom>
+        </p:spPr>
+        <p:txBody>
+          <a:bodyPr vert="horz" lIns="91440" tIns="45720" rIns="91440" bIns="45720" rtlCol="0" anchor="t">
+            <a:noAutofit/>
+          </a:bodyPr>
+          <a:lstStyle>
+            <a:lvl1pPr algn="l" defTabSz="457200" rtl="0" eaLnBrk="1" latinLnBrk="0" hangingPunct="1">
+              <a:spcBef>
+                <a:spcPct val="0"/>
+              </a:spcBef>
+              <a:buNone/>
+              <a:defRPr sz="4200" b="0" i="0" kern="1200">
+                <a:solidFill>
+                  <a:schemeClr val="tx2"/>
+                </a:solidFill>
+                <a:latin typeface="+mj-lt"/>
+                <a:ea typeface="+mj-ea"/>
+                <a:cs typeface="+mj-cs"/>
+              </a:defRPr>
+            </a:lvl1pPr>
+            <a:lvl2pPr eaLnBrk="1" hangingPunct="1">
+              <a:defRPr>
+                <a:solidFill>
+                  <a:schemeClr val="tx2"/>
+                </a:solidFill>
+              </a:defRPr>
+            </a:lvl2pPr>
+            <a:lvl3pPr eaLnBrk="1" hangingPunct="1">
+              <a:defRPr>
+                <a:solidFill>
+                  <a:schemeClr val="tx2"/>
+                </a:solidFill>
+              </a:defRPr>
+            </a:lvl3pPr>
+            <a:lvl4pPr eaLnBrk="1" hangingPunct="1">
+              <a:defRPr>
+                <a:solidFill>
+                  <a:schemeClr val="tx2"/>
+                </a:solidFill>
+              </a:defRPr>
+            </a:lvl4pPr>
+            <a:lvl5pPr eaLnBrk="1" hangingPunct="1">
+              <a:defRPr>
+                <a:solidFill>
+                  <a:schemeClr val="tx2"/>
+                </a:solidFill>
+              </a:defRPr>
+            </a:lvl5pPr>
+            <a:lvl6pPr eaLnBrk="1" hangingPunct="1">
+              <a:defRPr>
+                <a:solidFill>
+                  <a:schemeClr val="tx2"/>
+                </a:solidFill>
+              </a:defRPr>
+            </a:lvl6pPr>
+            <a:lvl7pPr eaLnBrk="1" hangingPunct="1">
+              <a:defRPr>
+                <a:solidFill>
+                  <a:schemeClr val="tx2"/>
+                </a:solidFill>
+              </a:defRPr>
+            </a:lvl7pPr>
+            <a:lvl8pPr eaLnBrk="1" hangingPunct="1">
+              <a:defRPr>
+                <a:solidFill>
+                  <a:schemeClr val="tx2"/>
+                </a:solidFill>
+              </a:defRPr>
+            </a:lvl8pPr>
+            <a:lvl9pPr eaLnBrk="1" hangingPunct="1">
+              <a:defRPr>
+                <a:solidFill>
+                  <a:schemeClr val="tx2"/>
+                </a:solidFill>
+              </a:defRPr>
+            </a:lvl9pPr>
+          </a:lstStyle>
+          <a:p>
+            <a:pPr marL="285750" indent="-285750">
+              <a:buFont typeface="Wingdings" panose="05000000000000000000" pitchFamily="2" charset="2"/>
+              <a:buChar char="ü"/>
+            </a:pPr>
+            <a:r>
+              <a:rPr lang="en-IN" sz="1600" dirty="0">
+                <a:solidFill>
+                  <a:schemeClr val="accent1">
+                    <a:lumMod val="60000"/>
+                    <a:lumOff val="40000"/>
+                  </a:schemeClr>
+                </a:solidFill>
+              </a:rPr>
+              <a:t>This image shows the data distribution of two output categories between (Positive and Negative) reviews.</a:t>
+            </a:r>
+          </a:p>
+          <a:p>
+            <a:pPr marL="285750" indent="-285750">
+              <a:buFont typeface="Wingdings" panose="05000000000000000000" pitchFamily="2" charset="2"/>
+              <a:buChar char="ü"/>
+            </a:pPr>
+            <a:r>
+              <a:rPr lang="en-IN" sz="1600" dirty="0">
+                <a:solidFill>
+                  <a:schemeClr val="accent1">
+                    <a:lumMod val="60000"/>
+                    <a:lumOff val="40000"/>
+                  </a:schemeClr>
+                </a:solidFill>
+              </a:rPr>
+              <a:t>And its shows that we have a perfectly balanced dataset, with approximately 6000 reviews from each of the output variable.</a:t>
+            </a:r>
+          </a:p>
+        </p:txBody>
+      </p:sp>
     </p:spTree>
     <p:extLst>
       <p:ext uri="{BB962C8B-B14F-4D97-AF65-F5344CB8AC3E}">
@@ -8800,15 +9339,7 @@
             </a:pPr>
             <a:r>
               <a:rPr lang="en-US" sz="1600" dirty="0"/>
-              <a:t>Removed punctuation, digits, and </a:t>
-            </a:r>
-            <a:r>
-              <a:rPr lang="en-US" sz="1600" dirty="0" err="1"/>
-              <a:t>stopwords</a:t>
-            </a:r>
-            <a:r>
-              <a:rPr lang="en-US" sz="1600" dirty="0"/>
-              <a:t> to clean the text.</a:t>
+              <a:t>Removed punctuation, digits, and stop words to clean the text.</a:t>
             </a:r>
           </a:p>
           <a:p>
